--- a/docs/기술설명서.pptx
+++ b/docs/기술설명서.pptx
@@ -39,6 +39,7 @@
     <p:sldId id="287" r:id="rId38"/>
     <p:sldId id="288" r:id="rId39"/>
     <p:sldId id="289" r:id="rId40"/>
+    <p:sldId id="290" r:id="rId41"/>
   </p:sldIdLst>
   <p:sldSz cx="12191695" cy="6858000" type="screen4x3"/>
   <p:notesSz cx="6858000" cy="9144000"/>
@@ -19439,6 +19440,837 @@
                 </a:solidFill>
                 <a:latin typeface="맑은 고딕"/>
               </a:rPr>
+              <a:t>15-1. 비워 둔 칸을 어떻게 메우는가</a:t>
+            </a:r>
+          </a:p>
+        </p:txBody>
+      </p:sp>
+      <p:sp>
+        <p:nvSpPr>
+          <p:cNvPr id="4" name="TextBox 3"/>
+          <p:cNvSpPr txBox="1"/>
+          <p:nvPr/>
+        </p:nvSpPr>
+        <p:spPr>
+          <a:xfrm>
+            <a:off x="713232" y="1316735"/>
+            <a:ext cx="10765231" cy="475488"/>
+          </a:xfrm>
+          <a:prstGeom prst="rect">
+            <a:avLst/>
+          </a:prstGeom>
+          <a:noFill/>
+        </p:spPr>
+        <p:txBody>
+          <a:bodyPr wrap="square" lIns="0" rIns="0" tIns="0" bIns="0">
+            <a:spAutoFit/>
+          </a:bodyPr>
+          <a:lstStyle/>
+          <a:p>
+            <a:pPr>
+              <a:defRPr b="1"/>
+            </a:pPr>
+            <a:r>
+              <a:rPr b="1" sz="2700">
+                <a:solidFill>
+                  <a:srgbClr val="191C1F"/>
+                </a:solidFill>
+                <a:latin typeface="맑은 고딕"/>
+              </a:rPr>
+              <a:t>지금 조건 12개 중 6개는 해결 경로가 비어 있습니다</a:t>
+            </a:r>
+          </a:p>
+        </p:txBody>
+      </p:sp>
+      <p:sp>
+        <p:nvSpPr>
+          <p:cNvPr id="5" name="TextBox 4"/>
+          <p:cNvSpPr txBox="1"/>
+          <p:nvPr/>
+        </p:nvSpPr>
+        <p:spPr>
+          <a:xfrm>
+            <a:off x="713232" y="1901951"/>
+            <a:ext cx="10765231" cy="474308"/>
+          </a:xfrm>
+          <a:prstGeom prst="rect">
+            <a:avLst/>
+          </a:prstGeom>
+          <a:noFill/>
+        </p:spPr>
+        <p:txBody>
+          <a:bodyPr wrap="square" lIns="0" rIns="0" tIns="0" bIns="0">
+            <a:spAutoFit/>
+          </a:bodyPr>
+          <a:lstStyle/>
+          <a:p>
+            <a:pPr>
+              <a:lnSpc>
+                <a:spcPct val="140000"/>
+              </a:lnSpc>
+            </a:pPr>
+            <a:r>
+              <a:rPr b="0" sz="1500">
+                <a:solidFill>
+                  <a:srgbClr val="5C636B"/>
+                </a:solidFill>
+                <a:latin typeface="맑은 고딕"/>
+              </a:rPr>
+              <a:t>이것은 추출 실패가 아닙니다. </a:t>
+            </a:r>
+            <a:r>
+              <a:rPr b="1" sz="1500">
+                <a:solidFill>
+                  <a:srgbClr val="191C1F"/>
+                </a:solidFill>
+                <a:latin typeface="맑은 고딕"/>
+              </a:rPr>
+              <a:t>문서에 없는 것</a:t>
+            </a:r>
+            <a:r>
+              <a:rPr b="0" sz="1500">
+                <a:solidFill>
+                  <a:srgbClr val="5C636B"/>
+                </a:solidFill>
+                <a:latin typeface="맑은 고딕"/>
+              </a:rPr>
+              <a:t>입니다. 원문 전체를 다시 검색해 확인했고, 없다는 사실을 화면에 그대로 적었습니다.</a:t>
+            </a:r>
+          </a:p>
+        </p:txBody>
+      </p:sp>
+      <p:graphicFrame>
+        <p:nvGraphicFramePr>
+          <p:cNvPr id="6" name="Table 5"/>
+          <p:cNvGraphicFramePr>
+            <a:graphicFrameLocks noGrp="1"/>
+          </p:cNvGraphicFramePr>
+          <p:nvPr/>
+        </p:nvGraphicFramePr>
+        <p:xfrm>
+          <a:off x="713232" y="2467699"/>
+          <a:ext cx="10765230" cy="1188720"/>
+        </p:xfrm>
+        <a:graphic>
+          <a:graphicData uri="http://schemas.openxmlformats.org/drawingml/2006/table">
+            <a:tbl>
+              <a:tblPr firstRow="1" bandRow="1">
+                <a:tableStyleId>{5C22544A-7EE6-4342-B048-85BDC9FD1C3A}</a:tableStyleId>
+              </a:tblPr>
+              <a:tblGrid>
+                <a:gridCol w="2798960"/>
+                <a:gridCol w="3983135"/>
+                <a:gridCol w="3983135"/>
+              </a:tblGrid>
+              <a:tr h="237744">
+                <a:tc>
+                  <a:txBody>
+                    <a:bodyPr wrap="square"/>
+                    <a:lstStyle/>
+                    <a:p>
+                      <a:r>
+                        <a:rPr b="1" sz="1250">
+                          <a:solidFill>
+                            <a:srgbClr val="191C1F"/>
+                          </a:solidFill>
+                          <a:latin typeface="맑은 고딕"/>
+                        </a:rPr>
+                        <a:t>왜 비었나</a:t>
+                      </a:r>
+                    </a:p>
+                  </a:txBody>
+                  <a:tcPr marL="73152" marR="73152" marT="27432" marB="27432" anchor="ctr">
+                    <a:solidFill>
+                      <a:srgbClr val="FBFAF8"/>
+                    </a:solidFill>
+                  </a:tcPr>
+                </a:tc>
+                <a:tc>
+                  <a:txBody>
+                    <a:bodyPr wrap="square"/>
+                    <a:lstStyle/>
+                    <a:p>
+                      <a:r>
+                        <a:rPr b="1" sz="1250">
+                          <a:solidFill>
+                            <a:srgbClr val="191C1F"/>
+                          </a:solidFill>
+                          <a:latin typeface="맑은 고딕"/>
+                        </a:rPr>
+                        <a:t>다음 단계</a:t>
+                      </a:r>
+                    </a:p>
+                  </a:txBody>
+                  <a:tcPr marL="73152" marR="73152" marT="27432" marB="27432" anchor="ctr">
+                    <a:solidFill>
+                      <a:srgbClr val="FBFAF8"/>
+                    </a:solidFill>
+                  </a:tcPr>
+                </a:tc>
+                <a:tc>
+                  <a:txBody>
+                    <a:bodyPr wrap="square"/>
+                    <a:lstStyle/>
+                    <a:p>
+                      <a:r>
+                        <a:rPr b="1" sz="1250">
+                          <a:solidFill>
+                            <a:srgbClr val="191C1F"/>
+                          </a:solidFill>
+                          <a:latin typeface="맑은 고딕"/>
+                        </a:rPr>
+                        <a:t>무엇으로 확인하나</a:t>
+                      </a:r>
+                    </a:p>
+                  </a:txBody>
+                  <a:tcPr marL="73152" marR="73152" marT="27432" marB="27432" anchor="ctr">
+                    <a:solidFill>
+                      <a:srgbClr val="FBFAF8"/>
+                    </a:solidFill>
+                  </a:tcPr>
+                </a:tc>
+              </a:tr>
+              <a:tr h="237744">
+                <a:tc>
+                  <a:txBody>
+                    <a:bodyPr wrap="square"/>
+                    <a:lstStyle/>
+                    <a:p>
+                      <a:r>
+                        <a:rPr b="0" sz="1250">
+                          <a:solidFill>
+                            <a:srgbClr val="5C636B"/>
+                          </a:solidFill>
+                          <a:latin typeface="맑은 고딕"/>
+                        </a:rPr>
+                        <a:t>공개문서가 </a:t>
+                      </a:r>
+                      <a:r>
+                        <a:rPr b="1" sz="1250">
+                          <a:solidFill>
+                            <a:srgbClr val="191C1F"/>
+                          </a:solidFill>
+                          <a:latin typeface="맑은 고딕"/>
+                        </a:rPr>
+                        <a:t>조건은 말하고 해결 방법은 말하지 않는다</a:t>
+                      </a:r>
+                    </a:p>
+                  </a:txBody>
+                  <a:tcPr marL="73152" marR="73152" marT="27432" marB="27432" anchor="ctr">
+                    <a:solidFill>
+                      <a:srgbClr val="FFFFFF"/>
+                    </a:solidFill>
+                  </a:tcPr>
+                </a:tc>
+                <a:tc>
+                  <a:txBody>
+                    <a:bodyPr wrap="square"/>
+                    <a:lstStyle/>
+                    <a:p>
+                      <a:r>
+                        <a:rPr b="0" sz="1250">
+                          <a:solidFill>
+                            <a:srgbClr val="5C636B"/>
+                          </a:solidFill>
+                          <a:latin typeface="맑은 고딕"/>
+                        </a:rPr>
+                        <a:t>수집 범위 확장 — 앱 내 도움말 · 고객센터 안내 · 상품 약관</a:t>
+                      </a:r>
+                    </a:p>
+                  </a:txBody>
+                  <a:tcPr marL="73152" marR="73152" marT="27432" marB="27432" anchor="ctr">
+                    <a:solidFill>
+                      <a:srgbClr val="FFFFFF"/>
+                    </a:solidFill>
+                  </a:tcPr>
+                </a:tc>
+                <a:tc>
+                  <a:txBody>
+                    <a:bodyPr wrap="square"/>
+                    <a:lstStyle/>
+                    <a:p>
+                      <a:r>
+                        <a:rPr b="0" sz="1250">
+                          <a:solidFill>
+                            <a:srgbClr val="5C636B"/>
+                          </a:solidFill>
+                          <a:latin typeface="맑은 고딕"/>
+                        </a:rPr>
+                        <a:t>근거가 붙은 조건 수 / </a:t>
+                      </a:r>
+                      <a:r>
+                        <a:rPr b="1" sz="1250">
+                          <a:solidFill>
+                            <a:srgbClr val="191C1F"/>
+                          </a:solidFill>
+                          <a:latin typeface="맑은 고딕"/>
+                        </a:rPr>
+                        <a:t>여전히 빈 조건 수</a:t>
+                      </a:r>
+                    </a:p>
+                  </a:txBody>
+                  <a:tcPr marL="73152" marR="73152" marT="27432" marB="27432" anchor="ctr">
+                    <a:solidFill>
+                      <a:srgbClr val="FFFFFF"/>
+                    </a:solidFill>
+                  </a:tcPr>
+                </a:tc>
+              </a:tr>
+              <a:tr h="237744">
+                <a:tc>
+                  <a:txBody>
+                    <a:bodyPr wrap="square"/>
+                    <a:lstStyle/>
+                    <a:p>
+                      <a:r>
+                        <a:rPr b="0" sz="1250">
+                          <a:solidFill>
+                            <a:srgbClr val="5C636B"/>
+                          </a:solidFill>
+                          <a:latin typeface="맑은 고딕"/>
+                        </a:rPr>
+                        <a:t>문서에 없어 </a:t>
+                      </a:r>
+                      <a:r>
+                        <a:rPr b="1" sz="1250">
+                          <a:solidFill>
+                            <a:srgbClr val="191C1F"/>
+                          </a:solidFill>
+                          <a:latin typeface="맑은 고딕"/>
+                        </a:rPr>
+                        <a:t>사람이 앱에서 직접 확인</a:t>
+                      </a:r>
+                      <a:r>
+                        <a:rPr b="0" sz="1250">
+                          <a:solidFill>
+                            <a:srgbClr val="5C636B"/>
+                          </a:solidFill>
+                          <a:latin typeface="맑은 고딕"/>
+                        </a:rPr>
+                        <a:t>한 건이 1개 (DCC)</a:t>
+                      </a:r>
+                    </a:p>
+                  </a:txBody>
+                  <a:tcPr marL="73152" marR="73152" marT="27432" marB="27432" anchor="ctr">
+                    <a:solidFill>
+                      <a:srgbClr val="FFFFFF"/>
+                    </a:solidFill>
+                  </a:tcPr>
+                </a:tc>
+                <a:tc>
+                  <a:txBody>
+                    <a:bodyPr wrap="square"/>
+                    <a:lstStyle/>
+                    <a:p>
+                      <a:r>
+                        <a:rPr b="0" sz="1250">
+                          <a:solidFill>
+                            <a:srgbClr val="5C636B"/>
+                          </a:solidFill>
+                          <a:latin typeface="맑은 고딕"/>
+                        </a:rPr>
+                        <a:t>실측을 기록 양식으로 고정 (</a:t>
+                      </a:r>
+                      <a:r>
+                        <a:rPr sz="1250">
+                          <a:solidFill>
+                            <a:srgbClr val="5C636B"/>
+                          </a:solidFill>
+                          <a:latin typeface="Consolas"/>
+                        </a:rPr>
+                        <a:t>basis: measured</a:t>
+                      </a:r>
+                      <a:r>
+                        <a:rPr b="0" sz="1250">
+                          <a:solidFill>
+                            <a:srgbClr val="5C636B"/>
+                          </a:solidFill>
+                          <a:latin typeface="맑은 고딕"/>
+                        </a:rPr>
+                        <a:t>)</a:t>
+                      </a:r>
+                    </a:p>
+                  </a:txBody>
+                  <a:tcPr marL="73152" marR="73152" marT="27432" marB="27432" anchor="ctr">
+                    <a:solidFill>
+                      <a:srgbClr val="FFFFFF"/>
+                    </a:solidFill>
+                  </a:tcPr>
+                </a:tc>
+                <a:tc>
+                  <a:txBody>
+                    <a:bodyPr wrap="square"/>
+                    <a:lstStyle/>
+                    <a:p>
+                      <a:r>
+                        <a:rPr b="0" sz="1250">
+                          <a:solidFill>
+                            <a:srgbClr val="5C636B"/>
+                          </a:solidFill>
+                          <a:latin typeface="맑은 고딕"/>
+                        </a:rPr>
+                        <a:t>조건마다 측정 기록 파일이 붙는가</a:t>
+                      </a:r>
+                    </a:p>
+                  </a:txBody>
+                  <a:tcPr marL="73152" marR="73152" marT="27432" marB="27432" anchor="ctr">
+                    <a:solidFill>
+                      <a:srgbClr val="FFFFFF"/>
+                    </a:solidFill>
+                  </a:tcPr>
+                </a:tc>
+              </a:tr>
+              <a:tr h="237744">
+                <a:tc>
+                  <a:txBody>
+                    <a:bodyPr wrap="square"/>
+                    <a:lstStyle/>
+                    <a:p>
+                      <a:r>
+                        <a:rPr b="0" sz="1250">
+                          <a:solidFill>
+                            <a:srgbClr val="5C636B"/>
+                          </a:solidFill>
+                          <a:latin typeface="맑은 고딕"/>
+                        </a:rPr>
+                        <a:t>채널은 아는데 </a:t>
+                      </a:r>
+                      <a:r>
+                        <a:rPr b="1" sz="1250">
+                          <a:solidFill>
+                            <a:srgbClr val="191C1F"/>
+                          </a:solidFill>
+                          <a:latin typeface="맑은 고딕"/>
+                        </a:rPr>
+                        <a:t>앱 안 경로</a:t>
+                      </a:r>
+                      <a:r>
+                        <a:rPr b="0" sz="1250">
+                          <a:solidFill>
+                            <a:srgbClr val="5C636B"/>
+                          </a:solidFill>
+                          <a:latin typeface="맑은 고딕"/>
+                        </a:rPr>
+                        <a:t>를 모른다</a:t>
+                      </a:r>
+                    </a:p>
+                  </a:txBody>
+                  <a:tcPr marL="73152" marR="73152" marT="27432" marB="27432" anchor="ctr">
+                    <a:solidFill>
+                      <a:srgbClr val="FFFFFF"/>
+                    </a:solidFill>
+                  </a:tcPr>
+                </a:tc>
+                <a:tc>
+                  <a:txBody>
+                    <a:bodyPr wrap="square"/>
+                    <a:lstStyle/>
+                    <a:p>
+                      <a:r>
+                        <a:rPr b="0" sz="1250">
+                          <a:solidFill>
+                            <a:srgbClr val="5C636B"/>
+                          </a:solidFill>
+                          <a:latin typeface="맑은 고딕"/>
+                        </a:rPr>
+                        <a:t>KB Pay 화면 매핑</a:t>
+                      </a:r>
+                    </a:p>
+                  </a:txBody>
+                  <a:tcPr marL="73152" marR="73152" marT="27432" marB="27432" anchor="ctr">
+                    <a:solidFill>
+                      <a:srgbClr val="FFFFFF"/>
+                    </a:solidFill>
+                  </a:tcPr>
+                </a:tc>
+                <a:tc>
+                  <a:txBody>
+                    <a:bodyPr wrap="square"/>
+                    <a:lstStyle/>
+                    <a:p>
+                      <a:r>
+                        <a:rPr b="0" sz="1250">
+                          <a:solidFill>
+                            <a:srgbClr val="5C636B"/>
+                          </a:solidFill>
+                          <a:latin typeface="맑은 고딕"/>
+                        </a:rPr>
+                        <a:t>그 링크가 실제로 그 설정 화면을 여는가</a:t>
+                      </a:r>
+                    </a:p>
+                  </a:txBody>
+                  <a:tcPr marL="73152" marR="73152" marT="27432" marB="27432" anchor="ctr">
+                    <a:solidFill>
+                      <a:srgbClr val="FFFFFF"/>
+                    </a:solidFill>
+                  </a:tcPr>
+                </a:tc>
+              </a:tr>
+              <a:tr h="237744">
+                <a:tc>
+                  <a:txBody>
+                    <a:bodyPr wrap="square"/>
+                    <a:lstStyle/>
+                    <a:p>
+                      <a:r>
+                        <a:rPr b="0" sz="1250">
+                          <a:solidFill>
+                            <a:srgbClr val="5C636B"/>
+                          </a:solidFill>
+                          <a:latin typeface="맑은 고딕"/>
+                        </a:rPr>
+                        <a:t>조건의 </a:t>
+                      </a:r>
+                      <a:r>
+                        <a:rPr b="1" sz="1250">
+                          <a:solidFill>
+                            <a:srgbClr val="191C1F"/>
+                          </a:solidFill>
+                          <a:latin typeface="맑은 고딕"/>
+                        </a:rPr>
+                        <a:t>적용 대상</a:t>
+                      </a:r>
+                      <a:r>
+                        <a:rPr b="0" sz="1250">
+                          <a:solidFill>
+                            <a:srgbClr val="5C636B"/>
+                          </a:solidFill>
+                          <a:latin typeface="맑은 고딕"/>
+                        </a:rPr>
+                        <a:t>을 사람이 붙이고 있다 (</a:t>
+                      </a:r>
+                      <a:r>
+                        <a:rPr sz="1250">
+                          <a:solidFill>
+                            <a:srgbClr val="5C636B"/>
+                          </a:solidFill>
+                          <a:latin typeface="Consolas"/>
+                        </a:rPr>
+                        <a:t>applies_when</a:t>
+                      </a:r>
+                      <a:r>
+                        <a:rPr b="0" sz="1250">
+                          <a:solidFill>
+                            <a:srgbClr val="5C636B"/>
+                          </a:solidFill>
+                          <a:latin typeface="맑은 고딕"/>
+                        </a:rPr>
+                        <a:t>)</a:t>
+                      </a:r>
+                    </a:p>
+                  </a:txBody>
+                  <a:tcPr marL="73152" marR="73152" marT="27432" marB="27432" anchor="ctr">
+                    <a:solidFill>
+                      <a:srgbClr val="FFFFFF"/>
+                    </a:solidFill>
+                  </a:tcPr>
+                </a:tc>
+                <a:tc>
+                  <a:txBody>
+                    <a:bodyPr wrap="square"/>
+                    <a:lstStyle/>
+                    <a:p>
+                      <a:r>
+                        <a:rPr b="0" sz="1250">
+                          <a:solidFill>
+                            <a:srgbClr val="5C636B"/>
+                          </a:solidFill>
+                          <a:latin typeface="맑은 고딕"/>
+                        </a:rPr>
+                        <a:t>추출 단계로 올린다 — 인용의 «체크카드의 경우» 같은 한정어를 형식화</a:t>
+                      </a:r>
+                    </a:p>
+                  </a:txBody>
+                  <a:tcPr marL="73152" marR="73152" marT="27432" marB="27432" anchor="ctr">
+                    <a:solidFill>
+                      <a:srgbClr val="FFFFFF"/>
+                    </a:solidFill>
+                  </a:tcPr>
+                </a:tc>
+                <a:tc>
+                  <a:txBody>
+                    <a:bodyPr wrap="square"/>
+                    <a:lstStyle/>
+                    <a:p>
+                      <a:r>
+                        <a:rPr b="0" sz="1250">
+                          <a:solidFill>
+                            <a:srgbClr val="5C636B"/>
+                          </a:solidFill>
+                          <a:latin typeface="맑은 고딕"/>
+                        </a:rPr>
+                        <a:t>사람이 붙인 것과 자동 추출이 일치하는가</a:t>
+                      </a:r>
+                    </a:p>
+                  </a:txBody>
+                  <a:tcPr marL="73152" marR="73152" marT="27432" marB="27432" anchor="ctr">
+                    <a:solidFill>
+                      <a:srgbClr val="FFFFFF"/>
+                    </a:solidFill>
+                  </a:tcPr>
+                </a:tc>
+              </a:tr>
+            </a:tbl>
+          </a:graphicData>
+        </a:graphic>
+      </p:graphicFrame>
+      <p:sp>
+        <p:nvSpPr>
+          <p:cNvPr id="7" name="Rectangle 6"/>
+          <p:cNvSpPr/>
+          <p:nvPr/>
+        </p:nvSpPr>
+        <p:spPr>
+          <a:xfrm>
+            <a:off x="713232" y="4442803"/>
+            <a:ext cx="32004" cy="725620"/>
+          </a:xfrm>
+          <a:prstGeom prst="rect">
+            <a:avLst/>
+          </a:prstGeom>
+          <a:solidFill>
+            <a:srgbClr val="C19A2E"/>
+          </a:solidFill>
+          <a:ln>
+            <a:noFill/>
+          </a:ln>
+          <a:effectLst/>
+        </p:spPr>
+        <p:style>
+          <a:lnRef idx="1">
+            <a:schemeClr val="accent1"/>
+          </a:lnRef>
+          <a:fillRef idx="3">
+            <a:schemeClr val="accent1"/>
+          </a:fillRef>
+          <a:effectRef idx="2">
+            <a:schemeClr val="accent1"/>
+          </a:effectRef>
+          <a:fontRef idx="minor">
+            <a:schemeClr val="lt1"/>
+          </a:fontRef>
+        </p:style>
+        <p:txBody>
+          <a:bodyPr rtlCol="0" anchor="ctr"/>
+          <a:lstStyle/>
+          <a:p>
+            <a:pPr algn="ctr"/>
+          </a:p>
+        </p:txBody>
+      </p:sp>
+      <p:sp>
+        <p:nvSpPr>
+          <p:cNvPr id="8" name="TextBox 7"/>
+          <p:cNvSpPr txBox="1"/>
+          <p:nvPr/>
+        </p:nvSpPr>
+        <p:spPr>
+          <a:xfrm>
+            <a:off x="877824" y="4442803"/>
+            <a:ext cx="10600639" cy="725620"/>
+          </a:xfrm>
+          <a:prstGeom prst="rect">
+            <a:avLst/>
+          </a:prstGeom>
+          <a:noFill/>
+        </p:spPr>
+        <p:txBody>
+          <a:bodyPr wrap="square" lIns="0" rIns="0" tIns="0" bIns="0">
+            <a:spAutoFit/>
+          </a:bodyPr>
+          <a:lstStyle/>
+          <a:p>
+            <a:pPr>
+              <a:lnSpc>
+                <a:spcPct val="135000"/>
+              </a:lnSpc>
+            </a:pPr>
+            <a:r>
+              <a:rPr b="1" sz="1500">
+                <a:solidFill>
+                  <a:srgbClr val="191C1F"/>
+                </a:solidFill>
+                <a:latin typeface="맑은 고딕"/>
+              </a:rPr>
+              <a:t>메우지 못하면 비워 둡니다.</a:t>
+            </a:r>
+            <a:r>
+              <a:rPr b="0" sz="1500">
+                <a:solidFill>
+                  <a:srgbClr val="5C636B"/>
+                </a:solidFill>
+                <a:latin typeface="맑은 고딕"/>
+              </a:rPr>
+              <a:t> 6을 0으로 만드는 것이 목표가 아닙니다. 지금의 답은 </a:t>
+            </a:r>
+            <a:r>
+              <a:rPr b="1" sz="1500">
+                <a:solidFill>
+                  <a:srgbClr val="191C1F"/>
+                </a:solidFill>
+                <a:latin typeface="맑은 고딕"/>
+              </a:rPr>
+              <a:t>빈 칸이 왜 비었는지 화면이 말하는 것</a:t>
+            </a:r>
+            <a:r>
+              <a:rPr b="0" sz="1500">
+                <a:solidFill>
+                  <a:srgbClr val="5C636B"/>
+                </a:solidFill>
+                <a:latin typeface="맑은 고딕"/>
+              </a:rPr>
+              <a:t>이고, 다음 단계는 </a:t>
+            </a:r>
+            <a:r>
+              <a:rPr b="1" sz="1500">
+                <a:solidFill>
+                  <a:srgbClr val="191C1F"/>
+                </a:solidFill>
+                <a:latin typeface="맑은 고딕"/>
+              </a:rPr>
+              <a:t>빈 칸을 줄이되 채운 근거를 함께 남기는 것</a:t>
+            </a:r>
+            <a:r>
+              <a:rPr b="0" sz="1500">
+                <a:solidFill>
+                  <a:srgbClr val="5C636B"/>
+                </a:solidFill>
+                <a:latin typeface="맑은 고딕"/>
+              </a:rPr>
+              <a:t>입니다. 근거 없이 채우는 순간 이 시스템은 다른 종류의 물건이 됩니다.</a:t>
+            </a:r>
+          </a:p>
+        </p:txBody>
+      </p:sp>
+      <p:sp>
+        <p:nvSpPr>
+          <p:cNvPr id="9" name="TextBox 8"/>
+          <p:cNvSpPr txBox="1"/>
+          <p:nvPr/>
+        </p:nvSpPr>
+        <p:spPr>
+          <a:xfrm>
+            <a:off x="10957255" y="6528816"/>
+            <a:ext cx="685800" cy="219456"/>
+          </a:xfrm>
+          <a:prstGeom prst="rect">
+            <a:avLst/>
+          </a:prstGeom>
+          <a:noFill/>
+        </p:spPr>
+        <p:txBody>
+          <a:bodyPr wrap="square" lIns="0" rIns="0" tIns="0" bIns="0">
+            <a:spAutoFit/>
+          </a:bodyPr>
+          <a:lstStyle/>
+          <a:p>
+            <a:pPr algn="r"/>
+            <a:r>
+              <a:rPr sz="1100">
+                <a:solidFill>
+                  <a:srgbClr val="6B7178"/>
+                </a:solidFill>
+                <a:latin typeface="맑은 고딕"/>
+              </a:rPr>
+              <a:t>30</a:t>
+            </a:r>
+          </a:p>
+        </p:txBody>
+      </p:sp>
+    </p:spTree>
+  </p:cSld>
+  <p:clrMapOvr>
+    <a:masterClrMapping/>
+  </p:clrMapOvr>
+</p:sld>
+</file>
+
+<file path=ppt/slides/slide31.xml><?xml version="1.0" encoding="utf-8"?>
+<p:sld xmlns:a="http://schemas.openxmlformats.org/drawingml/2006/main" xmlns:p="http://schemas.openxmlformats.org/presentationml/2006/main" xmlns:r="http://schemas.openxmlformats.org/officeDocument/2006/relationships">
+  <p:cSld>
+    <p:spTree>
+      <p:nvGrpSpPr>
+        <p:cNvPr id="1" name=""/>
+        <p:cNvGrpSpPr/>
+        <p:nvPr/>
+      </p:nvGrpSpPr>
+      <p:grpSpPr/>
+      <p:sp>
+        <p:nvSpPr>
+          <p:cNvPr id="2" name="Rectangle 1"/>
+          <p:cNvSpPr/>
+          <p:nvPr/>
+        </p:nvSpPr>
+        <p:spPr>
+          <a:xfrm>
+            <a:off x="0" y="0"/>
+            <a:ext cx="12191695" cy="6858000"/>
+          </a:xfrm>
+          <a:prstGeom prst="rect">
+            <a:avLst/>
+          </a:prstGeom>
+          <a:solidFill>
+            <a:srgbClr val="F6F5F2"/>
+          </a:solidFill>
+          <a:ln>
+            <a:noFill/>
+          </a:ln>
+          <a:effectLst/>
+        </p:spPr>
+        <p:style>
+          <a:lnRef idx="1">
+            <a:schemeClr val="accent1"/>
+          </a:lnRef>
+          <a:fillRef idx="3">
+            <a:schemeClr val="accent1"/>
+          </a:fillRef>
+          <a:effectRef idx="2">
+            <a:schemeClr val="accent1"/>
+          </a:effectRef>
+          <a:fontRef idx="minor">
+            <a:schemeClr val="lt1"/>
+          </a:fontRef>
+        </p:style>
+        <p:txBody>
+          <a:bodyPr rtlCol="0" anchor="ctr"/>
+          <a:lstStyle/>
+          <a:p>
+            <a:pPr algn="ctr"/>
+          </a:p>
+        </p:txBody>
+      </p:sp>
+      <p:sp>
+        <p:nvSpPr>
+          <p:cNvPr id="3" name="TextBox 2"/>
+          <p:cNvSpPr txBox="1"/>
+          <p:nvPr/>
+        </p:nvSpPr>
+        <p:spPr>
+          <a:xfrm>
+            <a:off x="713232" y="475488"/>
+            <a:ext cx="10765231" cy="658368"/>
+          </a:xfrm>
+          <a:prstGeom prst="rect">
+            <a:avLst/>
+          </a:prstGeom>
+          <a:noFill/>
+        </p:spPr>
+        <p:txBody>
+          <a:bodyPr wrap="square" lIns="0" rIns="0" tIns="0" bIns="0">
+            <a:spAutoFit/>
+          </a:bodyPr>
+          <a:lstStyle/>
+          <a:p>
+            <a:pPr>
+              <a:defRPr b="1"/>
+            </a:pPr>
+            <a:r>
+              <a:rPr b="1" sz="4000">
+                <a:solidFill>
+                  <a:srgbClr val="191C1F"/>
+                </a:solidFill>
+                <a:latin typeface="맑은 고딕"/>
+              </a:rPr>
               <a:t>16. 기술 실현 가능성</a:t>
             </a:r>
           </a:p>
@@ -20169,7 +21001,7 @@
                 </a:solidFill>
                 <a:latin typeface="맑은 고딕"/>
               </a:rPr>
-              <a:t>30</a:t>
+              <a:t>31</a:t>
             </a:r>
           </a:p>
         </p:txBody>
@@ -20182,7 +21014,7 @@
 </p:sld>
 </file>
 
-<file path=ppt/slides/slide31.xml><?xml version="1.0" encoding="utf-8"?>
+<file path=ppt/slides/slide32.xml><?xml version="1.0" encoding="utf-8"?>
 <p:sld xmlns:a="http://schemas.openxmlformats.org/drawingml/2006/main" xmlns:p="http://schemas.openxmlformats.org/presentationml/2006/main" xmlns:r="http://schemas.openxmlformats.org/officeDocument/2006/relationships">
   <p:cSld>
     <p:spTree>
@@ -20686,7 +21518,7 @@
                 </a:solidFill>
                 <a:latin typeface="맑은 고딕"/>
               </a:rPr>
-              <a:t>31</a:t>
+              <a:t>32</a:t>
             </a:r>
           </a:p>
         </p:txBody>
@@ -20699,7 +21531,7 @@
 </p:sld>
 </file>
 
-<file path=ppt/slides/slide32.xml><?xml version="1.0" encoding="utf-8"?>
+<file path=ppt/slides/slide33.xml><?xml version="1.0" encoding="utf-8"?>
 <p:sld xmlns:a="http://schemas.openxmlformats.org/drawingml/2006/main" xmlns:p="http://schemas.openxmlformats.org/presentationml/2006/main" xmlns:r="http://schemas.openxmlformats.org/officeDocument/2006/relationships">
   <p:cSld>
     <p:spTree>
@@ -21392,7 +22224,7 @@
                 </a:solidFill>
                 <a:latin typeface="맑은 고딕"/>
               </a:rPr>
-              <a:t>32</a:t>
+              <a:t>33</a:t>
             </a:r>
           </a:p>
         </p:txBody>
@@ -21405,7 +22237,7 @@
 </p:sld>
 </file>
 
-<file path=ppt/slides/slide33.xml><?xml version="1.0" encoding="utf-8"?>
+<file path=ppt/slides/slide34.xml><?xml version="1.0" encoding="utf-8"?>
 <p:sld xmlns:a="http://schemas.openxmlformats.org/drawingml/2006/main" xmlns:p="http://schemas.openxmlformats.org/presentationml/2006/main" xmlns:r="http://schemas.openxmlformats.org/officeDocument/2006/relationships">
   <p:cSld>
     <p:spTree>
@@ -21840,7 +22672,7 @@
                 </a:solidFill>
                 <a:latin typeface="맑은 고딕"/>
               </a:rPr>
-              <a:t>33</a:t>
+              <a:t>34</a:t>
             </a:r>
           </a:p>
         </p:txBody>
@@ -21853,7 +22685,7 @@
 </p:sld>
 </file>
 
-<file path=ppt/slides/slide34.xml><?xml version="1.0" encoding="utf-8"?>
+<file path=ppt/slides/slide35.xml><?xml version="1.0" encoding="utf-8"?>
 <p:sld xmlns:a="http://schemas.openxmlformats.org/drawingml/2006/main" xmlns:p="http://schemas.openxmlformats.org/presentationml/2006/main" xmlns:r="http://schemas.openxmlformats.org/officeDocument/2006/relationships">
   <p:cSld>
     <p:spTree>
@@ -22238,7 +23070,7 @@
                 </a:solidFill>
                 <a:latin typeface="맑은 고딕"/>
               </a:rPr>
-              <a:t>34</a:t>
+              <a:t>35</a:t>
             </a:r>
           </a:p>
         </p:txBody>

--- a/docs/기술설명서.pptx
+++ b/docs/기술설명서.pptx
@@ -7229,6 +7229,45 @@
                 </a:solidFill>
                 <a:latin typeface="맑은 고딕"/>
               </a:rPr>
+              <a:t>인용은 검증했는데, 해결 방법은 검증하지 않았습니다 (계속)</a:t>
+            </a:r>
+          </a:p>
+        </p:txBody>
+      </p:sp>
+      <p:sp>
+        <p:nvSpPr>
+          <p:cNvPr id="7" name="TextBox 6"/>
+          <p:cNvSpPr txBox="1"/>
+          <p:nvPr/>
+        </p:nvSpPr>
+        <p:spPr>
+          <a:xfrm>
+            <a:off x="713232" y="2985146"/>
+            <a:ext cx="10765231" cy="501758"/>
+          </a:xfrm>
+          <a:prstGeom prst="rect">
+            <a:avLst/>
+          </a:prstGeom>
+          <a:noFill/>
+        </p:spPr>
+        <p:txBody>
+          <a:bodyPr wrap="square" lIns="0" rIns="0" tIns="0" bIns="0">
+            <a:spAutoFit/>
+          </a:bodyPr>
+          <a:lstStyle/>
+          <a:p>
+            <a:pPr>
+              <a:lnSpc>
+                <a:spcPct val="105000"/>
+              </a:lnSpc>
+            </a:pPr>
+            <a:r>
+              <a:rPr sz="2700" b="1" i="0">
+                <a:solidFill>
+                  <a:srgbClr val="191C1F"/>
+                </a:solidFill>
+                <a:latin typeface="맑은 고딕"/>
+              </a:rPr>
               <a:t>고친 방법 — 네 겹으로</a:t>
             </a:r>
           </a:p>
@@ -7236,14 +7275,14 @@
       </p:sp>
       <p:graphicFrame>
         <p:nvGraphicFramePr>
-          <p:cNvPr id="7" name="Table 6"/>
+          <p:cNvPr id="8" name="Table 7"/>
           <p:cNvGraphicFramePr>
             <a:graphicFrameLocks noGrp="1"/>
           </p:cNvGraphicFramePr>
           <p:nvPr/>
         </p:nvGraphicFramePr>
         <p:xfrm>
-          <a:off x="713232" y="2985146"/>
+          <a:off x="713232" y="3614920"/>
           <a:ext cx="10765230" cy="2308606"/>
         </p:xfrm>
         <a:graphic>
@@ -7725,7 +7764,7 @@
       </p:graphicFrame>
       <p:sp>
         <p:nvSpPr>
-          <p:cNvPr id="8" name="TextBox 7"/>
+          <p:cNvPr id="9" name="TextBox 8"/>
           <p:cNvSpPr txBox="1"/>
           <p:nvPr/>
         </p:nvSpPr>
@@ -7981,7 +8020,7 @@
                 </a:solidFill>
                 <a:latin typeface="맑은 고딕"/>
               </a:rPr>
-              <a:t>이 구분은 화면에도 그대로 나옵니다</a:t>
+              <a:t>인용은 검증했는데, 해결 방법은 검증하지 않았습니다 (계속)</a:t>
             </a:r>
           </a:p>
         </p:txBody>
@@ -7995,6 +8034,45 @@
         <p:spPr>
           <a:xfrm>
             <a:off x="713232" y="2985146"/>
+            <a:ext cx="10765231" cy="501758"/>
+          </a:xfrm>
+          <a:prstGeom prst="rect">
+            <a:avLst/>
+          </a:prstGeom>
+          <a:noFill/>
+        </p:spPr>
+        <p:txBody>
+          <a:bodyPr wrap="square" lIns="0" rIns="0" tIns="0" bIns="0">
+            <a:spAutoFit/>
+          </a:bodyPr>
+          <a:lstStyle/>
+          <a:p>
+            <a:pPr>
+              <a:lnSpc>
+                <a:spcPct val="105000"/>
+              </a:lnSpc>
+            </a:pPr>
+            <a:r>
+              <a:rPr sz="2700" b="1" i="0">
+                <a:solidFill>
+                  <a:srgbClr val="191C1F"/>
+                </a:solidFill>
+                <a:latin typeface="맑은 고딕"/>
+              </a:rPr>
+              <a:t>이 구분은 화면에도 그대로 나옵니다</a:t>
+            </a:r>
+          </a:p>
+        </p:txBody>
+      </p:sp>
+      <p:sp>
+        <p:nvSpPr>
+          <p:cNvPr id="8" name="TextBox 7"/>
+          <p:cNvSpPr txBox="1"/>
+          <p:nvPr/>
+        </p:nvSpPr>
+        <p:spPr>
+          <a:xfrm>
+            <a:off x="713232" y="3614920"/>
             <a:ext cx="10765231" cy="371673"/>
           </a:xfrm>
           <a:prstGeom prst="rect">
@@ -8045,14 +8123,14 @@
       </p:sp>
       <p:graphicFrame>
         <p:nvGraphicFramePr>
-          <p:cNvPr id="8" name="Table 7"/>
+          <p:cNvPr id="9" name="Table 8"/>
           <p:cNvGraphicFramePr>
             <a:graphicFrameLocks noGrp="1"/>
           </p:cNvGraphicFramePr>
           <p:nvPr/>
         </p:nvGraphicFramePr>
         <p:xfrm>
-          <a:off x="713232" y="3466547"/>
+          <a:off x="713232" y="4096321"/>
           <a:ext cx="10765230" cy="1423670"/>
         </p:xfrm>
         <a:graphic>
@@ -8484,13 +8562,13 @@
       </p:graphicFrame>
       <p:sp>
         <p:nvSpPr>
-          <p:cNvPr id="9" name="TextBox 8"/>
+          <p:cNvPr id="10" name="TextBox 9"/>
           <p:cNvSpPr txBox="1"/>
           <p:nvPr/>
         </p:nvSpPr>
         <p:spPr>
           <a:xfrm>
-            <a:off x="713232" y="5146249"/>
+            <a:off x="713232" y="5776023"/>
             <a:ext cx="10765231" cy="371673"/>
           </a:xfrm>
           <a:prstGeom prst="rect">
@@ -8541,7 +8619,7 @@
       </p:sp>
       <p:sp>
         <p:nvSpPr>
-          <p:cNvPr id="10" name="TextBox 9"/>
+          <p:cNvPr id="11" name="TextBox 10"/>
           <p:cNvSpPr txBox="1"/>
           <p:nvPr/>
         </p:nvSpPr>
@@ -8677,52 +8755,13 @@
       </p:sp>
       <p:sp>
         <p:nvSpPr>
-          <p:cNvPr id="4" name="TextBox 3"/>
-          <p:cNvSpPr txBox="1"/>
+          <p:cNvPr id="4" name="Rectangle 3"/>
+          <p:cNvSpPr/>
           <p:nvPr/>
         </p:nvSpPr>
         <p:spPr>
           <a:xfrm>
             <a:off x="713232" y="1105262"/>
-            <a:ext cx="10765231" cy="501758"/>
-          </a:xfrm>
-          <a:prstGeom prst="rect">
-            <a:avLst/>
-          </a:prstGeom>
-          <a:noFill/>
-        </p:spPr>
-        <p:txBody>
-          <a:bodyPr wrap="square" lIns="0" rIns="0" tIns="0" bIns="0">
-            <a:spAutoFit/>
-          </a:bodyPr>
-          <a:lstStyle/>
-          <a:p>
-            <a:pPr>
-              <a:lnSpc>
-                <a:spcPct val="105000"/>
-              </a:lnSpc>
-            </a:pPr>
-            <a:r>
-              <a:rPr sz="2700" b="1" i="0">
-                <a:solidFill>
-                  <a:srgbClr val="191C1F"/>
-                </a:solidFill>
-                <a:latin typeface="맑은 고딕"/>
-              </a:rPr>
-              <a:t>한 번 더 확인했더니, 이번엔 반대 방향의 오류가 있었습니다</a:t>
-            </a:r>
-          </a:p>
-        </p:txBody>
-      </p:sp>
-      <p:sp>
-        <p:nvSpPr>
-          <p:cNvPr id="5" name="Rectangle 4"/>
-          <p:cNvSpPr/>
-          <p:nvPr/>
-        </p:nvSpPr>
-        <p:spPr>
-          <a:xfrm>
-            <a:off x="713232" y="1735036"/>
             <a:ext cx="10765231" cy="583524"/>
           </a:xfrm>
           <a:prstGeom prst="rect">
@@ -8791,13 +8830,13 @@
       </p:sp>
       <p:sp>
         <p:nvSpPr>
-          <p:cNvPr id="6" name="TextBox 5"/>
+          <p:cNvPr id="5" name="TextBox 4"/>
           <p:cNvSpPr txBox="1"/>
           <p:nvPr/>
         </p:nvSpPr>
         <p:spPr>
           <a:xfrm>
-            <a:off x="713232" y="2501440"/>
+            <a:off x="713232" y="1871666"/>
             <a:ext cx="10765231" cy="743346"/>
           </a:xfrm>
           <a:prstGeom prst="rect">
@@ -8875,13 +8914,13 @@
       </p:sp>
       <p:sp>
         <p:nvSpPr>
-          <p:cNvPr id="7" name="Rectangle 6"/>
+          <p:cNvPr id="6" name="Rectangle 5"/>
           <p:cNvSpPr/>
           <p:nvPr/>
         </p:nvSpPr>
         <p:spPr>
           <a:xfrm>
-            <a:off x="713232" y="3354514"/>
+            <a:off x="713232" y="2724740"/>
             <a:ext cx="32004" cy="743346"/>
           </a:xfrm>
           <a:prstGeom prst="rect">
@@ -8919,13 +8958,13 @@
       </p:sp>
       <p:sp>
         <p:nvSpPr>
-          <p:cNvPr id="8" name="TextBox 7"/>
+          <p:cNvPr id="7" name="TextBox 6"/>
           <p:cNvSpPr txBox="1"/>
           <p:nvPr/>
         </p:nvSpPr>
         <p:spPr>
           <a:xfrm>
-            <a:off x="896112" y="3354514"/>
+            <a:off x="896112" y="2724740"/>
             <a:ext cx="10582351" cy="743346"/>
           </a:xfrm>
           <a:prstGeom prst="rect">
@@ -8961,6 +9000,45 @@
                 <a:latin typeface="맑은 고딕"/>
               </a:rPr>
               <a:t> 10건이 이 원칙을 지킵니다. 근거 없는 remedy 를 되돌려 넣어 보면 테스트가 실제로 실패하는 것을 확인했습니다.</a:t>
+            </a:r>
+          </a:p>
+        </p:txBody>
+      </p:sp>
+      <p:sp>
+        <p:nvSpPr>
+          <p:cNvPr id="8" name="TextBox 7"/>
+          <p:cNvSpPr txBox="1"/>
+          <p:nvPr/>
+        </p:nvSpPr>
+        <p:spPr>
+          <a:xfrm>
+            <a:off x="713232" y="3614390"/>
+            <a:ext cx="10765231" cy="501758"/>
+          </a:xfrm>
+          <a:prstGeom prst="rect">
+            <a:avLst/>
+          </a:prstGeom>
+          <a:noFill/>
+        </p:spPr>
+        <p:txBody>
+          <a:bodyPr wrap="square" lIns="0" rIns="0" tIns="0" bIns="0">
+            <a:spAutoFit/>
+          </a:bodyPr>
+          <a:lstStyle/>
+          <a:p>
+            <a:pPr>
+              <a:lnSpc>
+                <a:spcPct val="105000"/>
+              </a:lnSpc>
+            </a:pPr>
+            <a:r>
+              <a:rPr sz="2700" b="1" i="0">
+                <a:solidFill>
+                  <a:srgbClr val="191C1F"/>
+                </a:solidFill>
+                <a:latin typeface="맑은 고딕"/>
+              </a:rPr>
+              <a:t>한 번 더 확인했더니, 이번엔 반대 방향의 오류가 있었습니다</a:t>
             </a:r>
           </a:p>
         </p:txBody>
@@ -9153,7 +9231,7 @@
                 </a:solidFill>
                 <a:latin typeface="맑은 고딕"/>
               </a:rPr>
-              <a:t>그리고 "KB 공개문서에 없다"고 말하지 않습니다 (계속)</a:t>
+              <a:t>결과 (계속)</a:t>
             </a:r>
           </a:p>
         </p:txBody>
@@ -26156,6 +26234,45 @@
                 </a:solidFill>
                 <a:latin typeface="맑은 고딕"/>
               </a:rPr>
+              <a:t>앱은 실패를 알려주지만, 원인은 알려주지 않는다 (계속)</a:t>
+            </a:r>
+          </a:p>
+        </p:txBody>
+      </p:sp>
+      <p:sp>
+        <p:nvSpPr>
+          <p:cNvPr id="7" name="TextBox 6"/>
+          <p:cNvSpPr txBox="1"/>
+          <p:nvPr/>
+        </p:nvSpPr>
+        <p:spPr>
+          <a:xfrm>
+            <a:off x="713232" y="2241800"/>
+            <a:ext cx="10765231" cy="501758"/>
+          </a:xfrm>
+          <a:prstGeom prst="rect">
+            <a:avLst/>
+          </a:prstGeom>
+          <a:noFill/>
+        </p:spPr>
+        <p:txBody>
+          <a:bodyPr wrap="square" lIns="0" rIns="0" tIns="0" bIns="0">
+            <a:spAutoFit/>
+          </a:bodyPr>
+          <a:lstStyle/>
+          <a:p>
+            <a:pPr>
+              <a:lnSpc>
+                <a:spcPct val="105000"/>
+              </a:lnSpc>
+            </a:pPr>
+            <a:r>
+              <a:rPr sz="2700" b="1" i="0">
+                <a:solidFill>
+                  <a:srgbClr val="191C1F"/>
+                </a:solidFill>
+                <a:latin typeface="맑은 고딕"/>
+              </a:rPr>
               <a:t>저희가 서는 자리 — 실패한 </a:t>
             </a:r>
             <a:r>
@@ -26190,13 +26307,13 @@
       </p:sp>
       <p:sp>
         <p:nvSpPr>
-          <p:cNvPr id="7" name="Rectangle 6"/>
+          <p:cNvPr id="8" name="Rectangle 7"/>
           <p:cNvSpPr/>
           <p:nvPr/>
         </p:nvSpPr>
         <p:spPr>
           <a:xfrm>
-            <a:off x="713232" y="2241800"/>
+            <a:off x="713232" y="2871574"/>
             <a:ext cx="10765231" cy="1002456"/>
           </a:xfrm>
           <a:prstGeom prst="rect">
@@ -26297,13 +26414,13 @@
       </p:sp>
       <p:sp>
         <p:nvSpPr>
-          <p:cNvPr id="8" name="TextBox 7"/>
+          <p:cNvPr id="9" name="TextBox 8"/>
           <p:cNvSpPr txBox="1"/>
           <p:nvPr/>
         </p:nvSpPr>
         <p:spPr>
           <a:xfrm>
-            <a:off x="713232" y="3427136"/>
+            <a:off x="713232" y="4056910"/>
             <a:ext cx="10765231" cy="743346"/>
           </a:xfrm>
           <a:prstGeom prst="rect">
@@ -26381,13 +26498,13 @@
       </p:sp>
       <p:sp>
         <p:nvSpPr>
-          <p:cNvPr id="9" name="TextBox 8"/>
+          <p:cNvPr id="10" name="TextBox 9"/>
           <p:cNvSpPr txBox="1"/>
           <p:nvPr/>
         </p:nvSpPr>
         <p:spPr>
           <a:xfrm>
-            <a:off x="713232" y="4280210"/>
+            <a:off x="713232" y="4909984"/>
             <a:ext cx="10765231" cy="743346"/>
           </a:xfrm>
           <a:prstGeom prst="rect">
@@ -26438,7 +26555,7 @@
       </p:sp>
       <p:sp>
         <p:nvSpPr>
-          <p:cNvPr id="10" name="TextBox 9"/>
+          <p:cNvPr id="11" name="TextBox 10"/>
           <p:cNvSpPr txBox="1"/>
           <p:nvPr/>
         </p:nvSpPr>
@@ -28855,7 +28972,25 @@
                 </a:solidFill>
                 <a:latin typeface="맑은 고딕"/>
               </a:rPr>
-              <a:t>왜 에이전트로 만들지 않았는가 (계속)</a:t>
+              <a:t>Retrieval-Augmented </a:t>
+            </a:r>
+            <a:r>
+              <a:rPr sz="2484" b="1" i="0">
+                <a:solidFill>
+                  <a:srgbClr val="191C1F"/>
+                </a:solidFill>
+                <a:latin typeface="맑은 고딕"/>
+              </a:rPr>
+              <a:t>Verification</a:t>
+            </a:r>
+            <a:r>
+              <a:rPr sz="2484" b="1" i="0">
+                <a:solidFill>
+                  <a:srgbClr val="191C1F"/>
+                </a:solidFill>
+                <a:latin typeface="맑은 고딕"/>
+              </a:rPr>
+              <a:t> (계속)</a:t>
             </a:r>
           </a:p>
         </p:txBody>
